--- a/stats_case_study/case_studies/18_survey_sampling_bias/presentation/case_study_presentation.pptx
+++ b/stats_case_study/case_studies/18_survey_sampling_bias/presentation/case_study_presentation.pptx
@@ -3467,8 +3467,8 @@
         </p:blipFill>
         <p:spPr>
           <a:xfrm>
-            <a:off x="548640" y="1683666"/>
-            <a:ext cx="11094415" cy="3536388"/>
+            <a:off x="548640" y="1675635"/>
+            <a:ext cx="11094415" cy="3552450"/>
           </a:xfrm>
           <a:prstGeom prst="rect">
             <a:avLst/>
@@ -5661,8 +5661,8 @@
         </p:blipFill>
         <p:spPr>
           <a:xfrm>
-            <a:off x="548640" y="1880461"/>
-            <a:ext cx="11094415" cy="3142797"/>
+            <a:off x="548640" y="1878470"/>
+            <a:ext cx="11094415" cy="3146779"/>
           </a:xfrm>
           <a:prstGeom prst="rect">
             <a:avLst/>
@@ -5944,8 +5944,8 @@
         </p:blipFill>
         <p:spPr>
           <a:xfrm>
-            <a:off x="2394739" y="1554480"/>
-            <a:ext cx="7402216" cy="3794760"/>
+            <a:off x="2409402" y="1554480"/>
+            <a:ext cx="7372890" cy="3794760"/>
           </a:xfrm>
           <a:prstGeom prst="rect">
             <a:avLst/>
@@ -5999,7 +5999,7 @@
                 </a:solidFill>
                 <a:latin typeface="Calibri"/>
               </a:rPr>
-              <a:t>Dots on the right of the grey line are over-represented among respondents; customers with complaints are under-represented.</a:t>
+              <a:t>Where the orange dot (respondents) sits to the right of the blue dot (all customers), the group is over-represented among respondents; customers with complaints are under-represented.</a:t>
             </a:r>
           </a:p>
         </p:txBody>
@@ -6227,8 +6227,8 @@
         </p:blipFill>
         <p:spPr>
           <a:xfrm>
-            <a:off x="548640" y="1637597"/>
-            <a:ext cx="11094415" cy="3628526"/>
+            <a:off x="548640" y="1632003"/>
+            <a:ext cx="11094415" cy="3639713"/>
           </a:xfrm>
           <a:prstGeom prst="rect">
             <a:avLst/>
@@ -7337,8 +7337,8 @@
         </p:blipFill>
         <p:spPr>
           <a:xfrm>
-            <a:off x="1822696" y="1554480"/>
-            <a:ext cx="8546303" cy="3794760"/>
+            <a:off x="1828539" y="1554480"/>
+            <a:ext cx="8534616" cy="3794760"/>
           </a:xfrm>
           <a:prstGeom prst="rect">
             <a:avLst/>
